--- a/public/10RCDG_RESCOM_ALERT_Final.pptx
+++ b/public/10RCDG_RESCOM_ALERT_Final.pptx
@@ -603,7 +603,7 @@
           </a:p>
           <a:p>
             <a:r>
-              <a:t>It will take you directly to our live military download portal at https://rescom-alert.vercel.app/download.</a:t>
+              <a:t>It will take you directly to our live military download portal at https://rescom-alert.site/download.</a:t>
             </a:r>
           </a:p>
           <a:p>
@@ -8534,7 +8534,7 @@
               </a:defRPr>
             </a:pPr>
             <a:r>
-              <a:t>👉 https://rescom-alert.vercel.app/download</a:t>
+              <a:t>👉 https://rescom-alert.site/download</a:t>
             </a:r>
           </a:p>
           <a:p>
